--- a/presentations/b07-pki/B07_PKI_Narrated.pptx
+++ b/presentations/b07-pki/B07_PKI_Narrated.pptx
@@ -185,7 +185,7 @@
     </p:spTree>
     <p:extLst>
       <p:ext uri="{BB962C8B-B14F-4D97-AF65-F5344CB8AC3E}">
-        <p14:creationId xmlns:p14="http://schemas.microsoft.com/office/powerpoint/2010/main" val="3220901562"/>
+        <p14:creationId xmlns:p14="http://schemas.microsoft.com/office/powerpoint/2010/main" val="456322487"/>
       </p:ext>
     </p:extLst>
   </p:cSld>
@@ -2436,7 +2436,7 @@
             <a:hlinkClick r:id="" action="ppaction://media"/>
             <a:extLst>
               <a:ext uri="{FF2B5EF4-FFF2-40B4-BE49-F238E27FC236}">
-                <a16:creationId xmlns:a16="http://schemas.microsoft.com/office/drawing/2014/main" id="{5DF36791-0DD3-3732-8B80-8383643700C8}"/>
+                <a16:creationId xmlns:a16="http://schemas.microsoft.com/office/drawing/2014/main" id="{39C4B5E5-EC00-6B4C-4EDF-13D5EC0764D7}"/>
               </a:ext>
             </a:extLst>
           </p:cNvPr>
@@ -2452,7 +2452,7 @@
                     <p:ext uri="{3AFAAA56-56D3-431D-BCD4-E75A35582382}">
                       <p173:tracksInfo xmlns:p173="http://schemas.microsoft.com/office/powerpoint/2017/3/main" displayLoc="slide">
                         <p173:trackLst>
-                          <p173:track id="{345753D8-4298-432E-BC7A-E2AFD40B12D9}" label="English (captions)" lang="en-US" r:embed="rId6"/>
+                          <p173:track id="{D86BD3D9-1690-4EC0-9505-C1CD27327F63}" label="English (captions)" lang="en-US" r:embed="rId6"/>
                         </p173:trackLst>
                       </p173:tracksInfo>
                     </p:ext>
@@ -2470,7 +2470,7 @@
         </p:blipFill>
         <p:spPr>
           <a:xfrm>
-            <a:off x="127000" y="6350000"/>
+            <a:off x="12446000" y="127000"/>
             <a:ext cx="304800" cy="304800"/>
           </a:xfrm>
           <a:prstGeom prst="rect">
@@ -3391,7 +3391,7 @@
             <a:hlinkClick r:id="" action="ppaction://media"/>
             <a:extLst>
               <a:ext uri="{FF2B5EF4-FFF2-40B4-BE49-F238E27FC236}">
-                <a16:creationId xmlns:a16="http://schemas.microsoft.com/office/drawing/2014/main" id="{3FA96574-7E70-6A16-52B4-CC23E7D0E831}"/>
+                <a16:creationId xmlns:a16="http://schemas.microsoft.com/office/drawing/2014/main" id="{88ACB3AD-587D-5240-4C32-07B140B75DF7}"/>
               </a:ext>
             </a:extLst>
           </p:cNvPr>
@@ -3407,7 +3407,7 @@
                     <p:ext uri="{3AFAAA56-56D3-431D-BCD4-E75A35582382}">
                       <p173:tracksInfo xmlns:p173="http://schemas.microsoft.com/office/powerpoint/2017/3/main" displayLoc="slide">
                         <p173:trackLst>
-                          <p173:track id="{4C8A15B4-0306-4946-BB5C-21FDE82083D9}" label="English (captions)" lang="en-US" r:embed="rId9"/>
+                          <p173:track id="{3B93004B-1D55-4F90-BA6C-3B2ED00E074F}" label="English (captions)" lang="en-US" r:embed="rId9"/>
                         </p173:trackLst>
                       </p173:tracksInfo>
                     </p:ext>
@@ -3425,7 +3425,7 @@
         </p:blipFill>
         <p:spPr>
           <a:xfrm>
-            <a:off x="127000" y="6350000"/>
+            <a:off x="12446000" y="127000"/>
             <a:ext cx="304800" cy="304800"/>
           </a:xfrm>
           <a:prstGeom prst="rect">
@@ -5620,7 +5620,7 @@
             <a:hlinkClick r:id="" action="ppaction://media"/>
             <a:extLst>
               <a:ext uri="{FF2B5EF4-FFF2-40B4-BE49-F238E27FC236}">
-                <a16:creationId xmlns:a16="http://schemas.microsoft.com/office/drawing/2014/main" id="{800973AD-96BB-72F1-7322-1AC83F78AC4C}"/>
+                <a16:creationId xmlns:a16="http://schemas.microsoft.com/office/drawing/2014/main" id="{0459A04B-F878-1111-305C-C98098B1EAC4}"/>
               </a:ext>
             </a:extLst>
           </p:cNvPr>
@@ -5636,7 +5636,7 @@
                     <p:ext uri="{3AFAAA56-56D3-431D-BCD4-E75A35582382}">
                       <p173:tracksInfo xmlns:p173="http://schemas.microsoft.com/office/powerpoint/2017/3/main" displayLoc="slide">
                         <p173:trackLst>
-                          <p173:track id="{2EEC9B1E-B300-4663-914A-C238A9EFDDE1}" label="English (captions)" lang="en-US" r:embed="rId8"/>
+                          <p173:track id="{A6D72A5E-3787-49CC-98AA-917C6FC614F9}" label="English (captions)" lang="en-US" r:embed="rId8"/>
                         </p173:trackLst>
                       </p173:tracksInfo>
                     </p:ext>
@@ -5654,7 +5654,7 @@
         </p:blipFill>
         <p:spPr>
           <a:xfrm>
-            <a:off x="127000" y="6350000"/>
+            <a:off x="12446000" y="127000"/>
             <a:ext cx="304800" cy="304800"/>
           </a:xfrm>
           <a:prstGeom prst="rect">
@@ -6728,7 +6728,7 @@
             <a:hlinkClick r:id="" action="ppaction://media"/>
             <a:extLst>
               <a:ext uri="{FF2B5EF4-FFF2-40B4-BE49-F238E27FC236}">
-                <a16:creationId xmlns:a16="http://schemas.microsoft.com/office/drawing/2014/main" id="{2A0404CF-DB1F-0C14-DD65-02241EF7D58A}"/>
+                <a16:creationId xmlns:a16="http://schemas.microsoft.com/office/drawing/2014/main" id="{9C0980FA-B1FB-7223-DD5D-6C7E6AFDFB4D}"/>
               </a:ext>
             </a:extLst>
           </p:cNvPr>
@@ -6744,7 +6744,7 @@
                     <p:ext uri="{3AFAAA56-56D3-431D-BCD4-E75A35582382}">
                       <p173:tracksInfo xmlns:p173="http://schemas.microsoft.com/office/powerpoint/2017/3/main" displayLoc="slide">
                         <p173:trackLst>
-                          <p173:track id="{0017E49C-B833-436A-80CD-889C73B240BF}" label="English (captions)" lang="en-US" r:embed="rId11"/>
+                          <p173:track id="{27255E4A-CEA2-4845-951E-33B891548C7E}" label="English (captions)" lang="en-US" r:embed="rId11"/>
                         </p173:trackLst>
                       </p173:tracksInfo>
                     </p:ext>
@@ -6762,7 +6762,7 @@
         </p:blipFill>
         <p:spPr>
           <a:xfrm>
-            <a:off x="127000" y="6350000"/>
+            <a:off x="12446000" y="127000"/>
             <a:ext cx="304800" cy="304800"/>
           </a:xfrm>
           <a:prstGeom prst="rect">
@@ -7831,7 +7831,7 @@
             <a:hlinkClick r:id="" action="ppaction://media"/>
             <a:extLst>
               <a:ext uri="{FF2B5EF4-FFF2-40B4-BE49-F238E27FC236}">
-                <a16:creationId xmlns:a16="http://schemas.microsoft.com/office/drawing/2014/main" id="{DA4E8FCA-F4E8-BC9F-6174-64AFEAF113EA}"/>
+                <a16:creationId xmlns:a16="http://schemas.microsoft.com/office/drawing/2014/main" id="{97587917-278B-1AED-695C-DDB2CF2F47BF}"/>
               </a:ext>
             </a:extLst>
           </p:cNvPr>
@@ -7847,7 +7847,7 @@
                     <p:ext uri="{3AFAAA56-56D3-431D-BCD4-E75A35582382}">
                       <p173:tracksInfo xmlns:p173="http://schemas.microsoft.com/office/powerpoint/2017/3/main" displayLoc="slide">
                         <p173:trackLst>
-                          <p173:track id="{838E555D-C24F-4F11-B594-959A26DD69E6}" label="English (captions)" lang="en-US" r:embed="rId11"/>
+                          <p173:track id="{03E978F2-2DDC-4785-A41C-8BA533BD2969}" label="English (captions)" lang="en-US" r:embed="rId11"/>
                         </p173:trackLst>
                       </p173:tracksInfo>
                     </p:ext>
@@ -7865,7 +7865,7 @@
         </p:blipFill>
         <p:spPr>
           <a:xfrm>
-            <a:off x="127000" y="6350000"/>
+            <a:off x="12446000" y="127000"/>
             <a:ext cx="304800" cy="304800"/>
           </a:xfrm>
           <a:prstGeom prst="rect">
@@ -9008,7 +9008,7 @@
             <a:hlinkClick r:id="" action="ppaction://media"/>
             <a:extLst>
               <a:ext uri="{FF2B5EF4-FFF2-40B4-BE49-F238E27FC236}">
-                <a16:creationId xmlns:a16="http://schemas.microsoft.com/office/drawing/2014/main" id="{AA525B52-BF5B-79F3-B63E-2A2D98FFD225}"/>
+                <a16:creationId xmlns:a16="http://schemas.microsoft.com/office/drawing/2014/main" id="{22BB4864-5CE8-018B-3E0C-5E312F4CC56E}"/>
               </a:ext>
             </a:extLst>
           </p:cNvPr>
@@ -9024,7 +9024,7 @@
                     <p:ext uri="{3AFAAA56-56D3-431D-BCD4-E75A35582382}">
                       <p173:tracksInfo xmlns:p173="http://schemas.microsoft.com/office/powerpoint/2017/3/main" displayLoc="slide">
                         <p173:trackLst>
-                          <p173:track id="{0508B4BC-A1F3-406B-8BF9-EB247062038F}" label="English (captions)" lang="en-US" r:embed="rId8"/>
+                          <p173:track id="{65759733-EBEA-48CC-BF90-422A2978ED51}" label="English (captions)" lang="en-US" r:embed="rId8"/>
                         </p173:trackLst>
                       </p173:tracksInfo>
                     </p:ext>
@@ -9042,7 +9042,7 @@
         </p:blipFill>
         <p:spPr>
           <a:xfrm>
-            <a:off x="127000" y="6350000"/>
+            <a:off x="12446000" y="127000"/>
             <a:ext cx="304800" cy="304800"/>
           </a:xfrm>
           <a:prstGeom prst="rect">
@@ -10943,7 +10943,7 @@
             <a:hlinkClick r:id="" action="ppaction://media"/>
             <a:extLst>
               <a:ext uri="{FF2B5EF4-FFF2-40B4-BE49-F238E27FC236}">
-                <a16:creationId xmlns:a16="http://schemas.microsoft.com/office/drawing/2014/main" id="{699F28FB-14FF-DB63-82D7-D46076297AAB}"/>
+                <a16:creationId xmlns:a16="http://schemas.microsoft.com/office/drawing/2014/main" id="{90409C4F-22B8-3677-A6ED-BDF92C80912D}"/>
               </a:ext>
             </a:extLst>
           </p:cNvPr>
@@ -10959,7 +10959,7 @@
                     <p:ext uri="{3AFAAA56-56D3-431D-BCD4-E75A35582382}">
                       <p173:tracksInfo xmlns:p173="http://schemas.microsoft.com/office/powerpoint/2017/3/main" displayLoc="slide">
                         <p173:trackLst>
-                          <p173:track id="{134C0613-DD54-476C-A915-4DD4A27AA6D3}" label="English (captions)" lang="en-US" r:embed="rId9"/>
+                          <p173:track id="{912D02CB-5100-480F-ADE8-5D42A665E927}" label="English (captions)" lang="en-US" r:embed="rId9"/>
                         </p173:trackLst>
                       </p173:tracksInfo>
                     </p:ext>
@@ -10977,7 +10977,7 @@
         </p:blipFill>
         <p:spPr>
           <a:xfrm>
-            <a:off x="127000" y="6350000"/>
+            <a:off x="12446000" y="127000"/>
             <a:ext cx="304800" cy="304800"/>
           </a:xfrm>
           <a:prstGeom prst="rect">
@@ -11914,7 +11914,7 @@
             <a:hlinkClick r:id="" action="ppaction://media"/>
             <a:extLst>
               <a:ext uri="{FF2B5EF4-FFF2-40B4-BE49-F238E27FC236}">
-                <a16:creationId xmlns:a16="http://schemas.microsoft.com/office/drawing/2014/main" id="{3F8AB78F-C303-4501-C434-29CD6773BBB6}"/>
+                <a16:creationId xmlns:a16="http://schemas.microsoft.com/office/drawing/2014/main" id="{EFFEC9D1-6ED3-542D-91CE-57F85A22A756}"/>
               </a:ext>
             </a:extLst>
           </p:cNvPr>
@@ -11930,7 +11930,7 @@
                     <p:ext uri="{3AFAAA56-56D3-431D-BCD4-E75A35582382}">
                       <p173:tracksInfo xmlns:p173="http://schemas.microsoft.com/office/powerpoint/2017/3/main" displayLoc="slide">
                         <p173:trackLst>
-                          <p173:track id="{EADAF1A4-D557-4689-9087-7A11FB776E1A}" label="English (captions)" lang="en-US" r:embed="rId7"/>
+                          <p173:track id="{AEEA2805-F28A-4E73-B15F-0B269E1D990B}" label="English (captions)" lang="en-US" r:embed="rId7"/>
                         </p173:trackLst>
                       </p173:tracksInfo>
                     </p:ext>
@@ -11948,7 +11948,7 @@
         </p:blipFill>
         <p:spPr>
           <a:xfrm>
-            <a:off x="127000" y="6350000"/>
+            <a:off x="12446000" y="127000"/>
             <a:ext cx="304800" cy="304800"/>
           </a:xfrm>
           <a:prstGeom prst="rect">
@@ -14968,7 +14968,7 @@
             <a:hlinkClick r:id="" action="ppaction://media"/>
             <a:extLst>
               <a:ext uri="{FF2B5EF4-FFF2-40B4-BE49-F238E27FC236}">
-                <a16:creationId xmlns:a16="http://schemas.microsoft.com/office/drawing/2014/main" id="{BFD691C2-0A02-BD7D-01C6-314AF5B91D9A}"/>
+                <a16:creationId xmlns:a16="http://schemas.microsoft.com/office/drawing/2014/main" id="{5EB36EDE-AD7E-A3E0-9191-53F9BB1450A2}"/>
               </a:ext>
             </a:extLst>
           </p:cNvPr>
@@ -14984,7 +14984,7 @@
                     <p:ext uri="{3AFAAA56-56D3-431D-BCD4-E75A35582382}">
                       <p173:tracksInfo xmlns:p173="http://schemas.microsoft.com/office/powerpoint/2017/3/main" displayLoc="slide">
                         <p173:trackLst>
-                          <p173:track id="{45EDE04E-14BC-4D85-8AE3-47FB8458354F}" label="English (captions)" lang="en-US" r:embed="rId7"/>
+                          <p173:track id="{39034D25-7E07-448F-8B45-27CB8F23D2E7}" label="English (captions)" lang="en-US" r:embed="rId7"/>
                         </p173:trackLst>
                       </p173:tracksInfo>
                     </p:ext>
@@ -15002,7 +15002,7 @@
         </p:blipFill>
         <p:spPr>
           <a:xfrm>
-            <a:off x="127000" y="6350000"/>
+            <a:off x="12446000" y="127000"/>
             <a:ext cx="304800" cy="304800"/>
           </a:xfrm>
           <a:prstGeom prst="rect">
@@ -16363,7 +16363,7 @@
             <a:hlinkClick r:id="" action="ppaction://media"/>
             <a:extLst>
               <a:ext uri="{FF2B5EF4-FFF2-40B4-BE49-F238E27FC236}">
-                <a16:creationId xmlns:a16="http://schemas.microsoft.com/office/drawing/2014/main" id="{7722E60C-D1CA-F8D1-BA95-9557AA2B1027}"/>
+                <a16:creationId xmlns:a16="http://schemas.microsoft.com/office/drawing/2014/main" id="{055872D9-7394-6F68-6EF6-CF0CCB2E8F5E}"/>
               </a:ext>
             </a:extLst>
           </p:cNvPr>
@@ -16379,7 +16379,7 @@
                     <p:ext uri="{3AFAAA56-56D3-431D-BCD4-E75A35582382}">
                       <p173:tracksInfo xmlns:p173="http://schemas.microsoft.com/office/powerpoint/2017/3/main" displayLoc="slide">
                         <p173:trackLst>
-                          <p173:track id="{9B58E82B-DC35-4746-B537-ACC15529D1E0}" label="English (captions)" lang="en-US" r:embed="rId11"/>
+                          <p173:track id="{5315EA0A-25CC-42DC-9E13-C6C94EA1A32D}" label="English (captions)" lang="en-US" r:embed="rId11"/>
                         </p173:trackLst>
                       </p173:tracksInfo>
                     </p:ext>
@@ -16397,7 +16397,7 @@
         </p:blipFill>
         <p:spPr>
           <a:xfrm>
-            <a:off x="127000" y="6350000"/>
+            <a:off x="12446000" y="127000"/>
             <a:ext cx="304800" cy="304800"/>
           </a:xfrm>
           <a:prstGeom prst="rect">
@@ -17841,7 +17841,7 @@
             <a:hlinkClick r:id="" action="ppaction://media"/>
             <a:extLst>
               <a:ext uri="{FF2B5EF4-FFF2-40B4-BE49-F238E27FC236}">
-                <a16:creationId xmlns:a16="http://schemas.microsoft.com/office/drawing/2014/main" id="{A5B8990E-8359-5D0D-A5AF-32891F4DB8B5}"/>
+                <a16:creationId xmlns:a16="http://schemas.microsoft.com/office/drawing/2014/main" id="{4D1FBCD6-0FE8-84D4-73C4-8899AC35B6EF}"/>
               </a:ext>
             </a:extLst>
           </p:cNvPr>
@@ -17857,7 +17857,7 @@
                     <p:ext uri="{3AFAAA56-56D3-431D-BCD4-E75A35582382}">
                       <p173:tracksInfo xmlns:p173="http://schemas.microsoft.com/office/powerpoint/2017/3/main" displayLoc="slide">
                         <p173:trackLst>
-                          <p173:track id="{CDB28362-5594-467A-B58D-C2929DD3FB0A}" label="English (captions)" lang="en-US" r:embed="rId8"/>
+                          <p173:track id="{7D19301E-8EFD-4A0B-9F90-4F54C8017916}" label="English (captions)" lang="en-US" r:embed="rId8"/>
                         </p173:trackLst>
                       </p173:tracksInfo>
                     </p:ext>
@@ -17875,7 +17875,7 @@
         </p:blipFill>
         <p:spPr>
           <a:xfrm>
-            <a:off x="127000" y="6350000"/>
+            <a:off x="12446000" y="127000"/>
             <a:ext cx="304800" cy="304800"/>
           </a:xfrm>
           <a:prstGeom prst="rect">
@@ -19120,7 +19120,7 @@
             <a:hlinkClick r:id="" action="ppaction://media"/>
             <a:extLst>
               <a:ext uri="{FF2B5EF4-FFF2-40B4-BE49-F238E27FC236}">
-                <a16:creationId xmlns:a16="http://schemas.microsoft.com/office/drawing/2014/main" id="{FD58F5CB-651C-E23C-8ADE-F87BC3438F40}"/>
+                <a16:creationId xmlns:a16="http://schemas.microsoft.com/office/drawing/2014/main" id="{A9BC710F-C0BA-DEA5-4930-38C866D7D171}"/>
               </a:ext>
             </a:extLst>
           </p:cNvPr>
@@ -19136,7 +19136,7 @@
                     <p:ext uri="{3AFAAA56-56D3-431D-BCD4-E75A35582382}">
                       <p173:tracksInfo xmlns:p173="http://schemas.microsoft.com/office/powerpoint/2017/3/main" displayLoc="slide">
                         <p173:trackLst>
-                          <p173:track id="{29F5932D-D63A-4A5A-B9D3-6C5EBC24EB08}" label="English (captions)" lang="en-US" r:embed="rId10"/>
+                          <p173:track id="{55A369F5-F7F9-4384-BD7E-E6703D04E907}" label="English (captions)" lang="en-US" r:embed="rId10"/>
                         </p173:trackLst>
                       </p173:tracksInfo>
                     </p:ext>
@@ -19154,7 +19154,7 @@
         </p:blipFill>
         <p:spPr>
           <a:xfrm>
-            <a:off x="127000" y="6350000"/>
+            <a:off x="12446000" y="127000"/>
             <a:ext cx="304800" cy="304800"/>
           </a:xfrm>
           <a:prstGeom prst="rect">
@@ -20697,7 +20697,7 @@
             <a:hlinkClick r:id="" action="ppaction://media"/>
             <a:extLst>
               <a:ext uri="{FF2B5EF4-FFF2-40B4-BE49-F238E27FC236}">
-                <a16:creationId xmlns:a16="http://schemas.microsoft.com/office/drawing/2014/main" id="{CDCE940E-0F78-19A9-C49C-443CF7371DDC}"/>
+                <a16:creationId xmlns:a16="http://schemas.microsoft.com/office/drawing/2014/main" id="{201B711E-4FF9-539F-FF0E-346E17328B7D}"/>
               </a:ext>
             </a:extLst>
           </p:cNvPr>
@@ -20713,7 +20713,7 @@
                     <p:ext uri="{3AFAAA56-56D3-431D-BCD4-E75A35582382}">
                       <p173:tracksInfo xmlns:p173="http://schemas.microsoft.com/office/powerpoint/2017/3/main" displayLoc="slide">
                         <p173:trackLst>
-                          <p173:track id="{EFB99ADF-07AA-46BB-A317-94F847B64C5C}" label="English (captions)" lang="en-US" r:embed="rId10"/>
+                          <p173:track id="{58AEE1F2-3D79-4B39-A513-AEBCB1F21205}" label="English (captions)" lang="en-US" r:embed="rId10"/>
                         </p173:trackLst>
                       </p173:tracksInfo>
                     </p:ext>
@@ -20731,7 +20731,7 @@
         </p:blipFill>
         <p:spPr>
           <a:xfrm>
-            <a:off x="127000" y="6350000"/>
+            <a:off x="12446000" y="127000"/>
             <a:ext cx="304800" cy="304800"/>
           </a:xfrm>
           <a:prstGeom prst="rect">
